--- a/Week_3/SQL_postgres.pptx
+++ b/Week_3/SQL_postgres.pptx
@@ -454,7 +454,7 @@
             <a:fld id="{B61BEF0D-F0BB-DE4B-95CE-6DB70DBA9567}" type="datetimeFigureOut">
               <a:rPr lang="en-US" dirty="0"/>
               <a:pPr/>
-              <a:t>9/9/2026</a:t>
+              <a:t>9/10/2026</a:t>
             </a:fld>
             <a:endParaRPr lang="en-US" dirty="0"/>
           </a:p>
@@ -716,7 +716,7 @@
             <a:fld id="{B61BEF0D-F0BB-DE4B-95CE-6DB70DBA9567}" type="datetimeFigureOut">
               <a:rPr lang="en-US" dirty="0"/>
               <a:pPr/>
-              <a:t>9/9/2026</a:t>
+              <a:t>9/10/2026</a:t>
             </a:fld>
             <a:endParaRPr lang="en-US" dirty="0"/>
           </a:p>
@@ -951,7 +951,7 @@
             <a:fld id="{B61BEF0D-F0BB-DE4B-95CE-6DB70DBA9567}" type="datetimeFigureOut">
               <a:rPr lang="en-US" dirty="0"/>
               <a:pPr/>
-              <a:t>9/9/2026</a:t>
+              <a:t>9/10/2026</a:t>
             </a:fld>
             <a:endParaRPr lang="en-US" dirty="0"/>
           </a:p>
@@ -1198,7 +1198,7 @@
             <a:fld id="{B61BEF0D-F0BB-DE4B-95CE-6DB70DBA9567}" type="datetimeFigureOut">
               <a:rPr lang="en-US" dirty="0"/>
               <a:pPr/>
-              <a:t>9/9/2026</a:t>
+              <a:t>9/10/2026</a:t>
             </a:fld>
             <a:endParaRPr lang="en-US" dirty="0"/>
           </a:p>
@@ -1506,7 +1506,7 @@
             <a:fld id="{B61BEF0D-F0BB-DE4B-95CE-6DB70DBA9567}" type="datetimeFigureOut">
               <a:rPr lang="en-US" dirty="0"/>
               <a:pPr/>
-              <a:t>9/9/2026</a:t>
+              <a:t>9/10/2026</a:t>
             </a:fld>
             <a:endParaRPr lang="en-US" dirty="0"/>
           </a:p>
@@ -1807,7 +1807,7 @@
             <a:fld id="{B61BEF0D-F0BB-DE4B-95CE-6DB70DBA9567}" type="datetimeFigureOut">
               <a:rPr lang="en-US" dirty="0"/>
               <a:pPr/>
-              <a:t>9/9/2026</a:t>
+              <a:t>9/10/2026</a:t>
             </a:fld>
             <a:endParaRPr lang="en-US" dirty="0"/>
           </a:p>
@@ -2228,7 +2228,7 @@
             <a:fld id="{B61BEF0D-F0BB-DE4B-95CE-6DB70DBA9567}" type="datetimeFigureOut">
               <a:rPr lang="en-US" dirty="0"/>
               <a:pPr/>
-              <a:t>9/9/2026</a:t>
+              <a:t>9/10/2026</a:t>
             </a:fld>
             <a:endParaRPr lang="en-US" dirty="0"/>
           </a:p>
@@ -2391,7 +2391,7 @@
             <a:fld id="{B61BEF0D-F0BB-DE4B-95CE-6DB70DBA9567}" type="datetimeFigureOut">
               <a:rPr lang="en-US" dirty="0"/>
               <a:pPr/>
-              <a:t>9/9/2026</a:t>
+              <a:t>9/10/2026</a:t>
             </a:fld>
             <a:endParaRPr lang="en-US" dirty="0"/>
           </a:p>
@@ -2488,7 +2488,7 @@
             <a:fld id="{B61BEF0D-F0BB-DE4B-95CE-6DB70DBA9567}" type="datetimeFigureOut">
               <a:rPr lang="en-US" dirty="0"/>
               <a:pPr/>
-              <a:t>9/9/2026</a:t>
+              <a:t>9/10/2026</a:t>
             </a:fld>
             <a:endParaRPr lang="en-US" dirty="0"/>
           </a:p>
@@ -2866,7 +2866,7 @@
             <a:fld id="{B61BEF0D-F0BB-DE4B-95CE-6DB70DBA9567}" type="datetimeFigureOut">
               <a:rPr lang="en-US" dirty="0"/>
               <a:pPr/>
-              <a:t>9/9/2026</a:t>
+              <a:t>9/10/2026</a:t>
             </a:fld>
             <a:endParaRPr lang="en-US" dirty="0"/>
           </a:p>
@@ -3152,7 +3152,7 @@
             <a:fld id="{B61BEF0D-F0BB-DE4B-95CE-6DB70DBA9567}" type="datetimeFigureOut">
               <a:rPr lang="en-US" dirty="0"/>
               <a:pPr/>
-              <a:t>9/9/2026</a:t>
+              <a:t>9/10/2026</a:t>
             </a:fld>
             <a:endParaRPr lang="en-US" dirty="0"/>
           </a:p>
@@ -3391,7 +3391,7 @@
             <a:fld id="{B61BEF0D-F0BB-DE4B-95CE-6DB70DBA9567}" type="datetimeFigureOut">
               <a:rPr lang="en-US" dirty="0"/>
               <a:pPr/>
-              <a:t>9/9/2026</a:t>
+              <a:t>9/10/2026</a:t>
             </a:fld>
             <a:endParaRPr lang="en-US" dirty="0"/>
           </a:p>
@@ -4879,6 +4879,50 @@
           </a:ln>
         </p:spPr>
       </p:pic>
+      <p:sp>
+        <p:nvSpPr>
+          <p:cNvPr id="3" name="Rectangle 2">
+            <a:extLst>
+              <a:ext uri="{FF2B5EF4-FFF2-40B4-BE49-F238E27FC236}">
+                <a16:creationId xmlns:a16="http://schemas.microsoft.com/office/drawing/2014/main" id="{A4D87402-040A-FCBB-A6DE-11C4D2384276}"/>
+              </a:ext>
+            </a:extLst>
+          </p:cNvPr>
+          <p:cNvSpPr/>
+          <p:nvPr/>
+        </p:nvSpPr>
+        <p:spPr>
+          <a:xfrm>
+            <a:off x="10674981" y="927100"/>
+            <a:ext cx="735969" cy="571500"/>
+          </a:xfrm>
+          <a:prstGeom prst="rect">
+            <a:avLst/>
+          </a:prstGeom>
+        </p:spPr>
+        <p:style>
+          <a:lnRef idx="1">
+            <a:schemeClr val="accent5"/>
+          </a:lnRef>
+          <a:fillRef idx="3">
+            <a:schemeClr val="accent5"/>
+          </a:fillRef>
+          <a:effectRef idx="2">
+            <a:schemeClr val="accent5"/>
+          </a:effectRef>
+          <a:fontRef idx="minor">
+            <a:schemeClr val="lt1"/>
+          </a:fontRef>
+        </p:style>
+        <p:txBody>
+          <a:bodyPr rtlCol="0" anchor="ctr"/>
+          <a:lstStyle/>
+          <a:p>
+            <a:pPr algn="ctr"/>
+            <a:endParaRPr lang="en-US"/>
+          </a:p>
+        </p:txBody>
+      </p:sp>
     </p:spTree>
     <p:extLst>
       <p:ext uri="{BB962C8B-B14F-4D97-AF65-F5344CB8AC3E}">
@@ -5204,6 +5248,50 @@
               <a:uFillTx/>
               <a:latin typeface="Arial"/>
             </a:endParaRPr>
+          </a:p>
+        </p:txBody>
+      </p:sp>
+      <p:sp>
+        <p:nvSpPr>
+          <p:cNvPr id="4" name="Rectangle 3">
+            <a:extLst>
+              <a:ext uri="{FF2B5EF4-FFF2-40B4-BE49-F238E27FC236}">
+                <a16:creationId xmlns:a16="http://schemas.microsoft.com/office/drawing/2014/main" id="{F5B2E89C-A183-9093-9126-80A15EF8A784}"/>
+              </a:ext>
+            </a:extLst>
+          </p:cNvPr>
+          <p:cNvSpPr/>
+          <p:nvPr/>
+        </p:nvSpPr>
+        <p:spPr>
+          <a:xfrm>
+            <a:off x="10649581" y="923306"/>
+            <a:ext cx="735969" cy="571500"/>
+          </a:xfrm>
+          <a:prstGeom prst="rect">
+            <a:avLst/>
+          </a:prstGeom>
+        </p:spPr>
+        <p:style>
+          <a:lnRef idx="1">
+            <a:schemeClr val="accent5"/>
+          </a:lnRef>
+          <a:fillRef idx="3">
+            <a:schemeClr val="accent5"/>
+          </a:fillRef>
+          <a:effectRef idx="2">
+            <a:schemeClr val="accent5"/>
+          </a:effectRef>
+          <a:fontRef idx="minor">
+            <a:schemeClr val="lt1"/>
+          </a:fontRef>
+        </p:style>
+        <p:txBody>
+          <a:bodyPr rtlCol="0" anchor="ctr"/>
+          <a:lstStyle/>
+          <a:p>
+            <a:pPr algn="ctr"/>
+            <a:endParaRPr lang="en-US"/>
           </a:p>
         </p:txBody>
       </p:sp>
@@ -5455,6 +5543,50 @@
           </a:ln>
         </p:spPr>
       </p:pic>
+      <p:sp>
+        <p:nvSpPr>
+          <p:cNvPr id="4" name="Rectangle 3">
+            <a:extLst>
+              <a:ext uri="{FF2B5EF4-FFF2-40B4-BE49-F238E27FC236}">
+                <a16:creationId xmlns:a16="http://schemas.microsoft.com/office/drawing/2014/main" id="{F8B17D45-7F99-F1B6-5316-27590AE0E6DF}"/>
+              </a:ext>
+            </a:extLst>
+          </p:cNvPr>
+          <p:cNvSpPr/>
+          <p:nvPr/>
+        </p:nvSpPr>
+        <p:spPr>
+          <a:xfrm>
+            <a:off x="10611481" y="923306"/>
+            <a:ext cx="735969" cy="571500"/>
+          </a:xfrm>
+          <a:prstGeom prst="rect">
+            <a:avLst/>
+          </a:prstGeom>
+        </p:spPr>
+        <p:style>
+          <a:lnRef idx="1">
+            <a:schemeClr val="accent5"/>
+          </a:lnRef>
+          <a:fillRef idx="3">
+            <a:schemeClr val="accent5"/>
+          </a:fillRef>
+          <a:effectRef idx="2">
+            <a:schemeClr val="accent5"/>
+          </a:effectRef>
+          <a:fontRef idx="minor">
+            <a:schemeClr val="lt1"/>
+          </a:fontRef>
+        </p:style>
+        <p:txBody>
+          <a:bodyPr rtlCol="0" anchor="ctr"/>
+          <a:lstStyle/>
+          <a:p>
+            <a:pPr algn="ctr"/>
+            <a:endParaRPr lang="en-US"/>
+          </a:p>
+        </p:txBody>
+      </p:sp>
     </p:spTree>
     <p:extLst>
       <p:ext uri="{BB962C8B-B14F-4D97-AF65-F5344CB8AC3E}">
@@ -6594,6 +6726,50 @@
           </a:ln>
         </p:spPr>
       </p:pic>
+      <p:sp>
+        <p:nvSpPr>
+          <p:cNvPr id="4" name="Rectangle 3">
+            <a:extLst>
+              <a:ext uri="{FF2B5EF4-FFF2-40B4-BE49-F238E27FC236}">
+                <a16:creationId xmlns:a16="http://schemas.microsoft.com/office/drawing/2014/main" id="{E868FFED-7783-C528-66D3-390F76608390}"/>
+              </a:ext>
+            </a:extLst>
+          </p:cNvPr>
+          <p:cNvSpPr/>
+          <p:nvPr/>
+        </p:nvSpPr>
+        <p:spPr>
+          <a:xfrm>
+            <a:off x="10674981" y="927100"/>
+            <a:ext cx="735969" cy="571500"/>
+          </a:xfrm>
+          <a:prstGeom prst="rect">
+            <a:avLst/>
+          </a:prstGeom>
+        </p:spPr>
+        <p:style>
+          <a:lnRef idx="1">
+            <a:schemeClr val="accent5"/>
+          </a:lnRef>
+          <a:fillRef idx="3">
+            <a:schemeClr val="accent5"/>
+          </a:fillRef>
+          <a:effectRef idx="2">
+            <a:schemeClr val="accent5"/>
+          </a:effectRef>
+          <a:fontRef idx="minor">
+            <a:schemeClr val="lt1"/>
+          </a:fontRef>
+        </p:style>
+        <p:txBody>
+          <a:bodyPr rtlCol="0" anchor="ctr"/>
+          <a:lstStyle/>
+          <a:p>
+            <a:pPr algn="ctr"/>
+            <a:endParaRPr lang="en-US"/>
+          </a:p>
+        </p:txBody>
+      </p:sp>
     </p:spTree>
     <p:extLst>
       <p:ext uri="{BB962C8B-B14F-4D97-AF65-F5344CB8AC3E}">
@@ -7028,6 +7204,50 @@
               <a:uFillTx/>
               <a:latin typeface="Arial"/>
             </a:endParaRPr>
+          </a:p>
+        </p:txBody>
+      </p:sp>
+      <p:sp>
+        <p:nvSpPr>
+          <p:cNvPr id="4" name="Rectangle 3">
+            <a:extLst>
+              <a:ext uri="{FF2B5EF4-FFF2-40B4-BE49-F238E27FC236}">
+                <a16:creationId xmlns:a16="http://schemas.microsoft.com/office/drawing/2014/main" id="{2520BDC7-BB31-3AC7-AC31-81F155311791}"/>
+              </a:ext>
+            </a:extLst>
+          </p:cNvPr>
+          <p:cNvSpPr/>
+          <p:nvPr/>
+        </p:nvSpPr>
+        <p:spPr>
+          <a:xfrm>
+            <a:off x="10674981" y="927100"/>
+            <a:ext cx="735969" cy="571500"/>
+          </a:xfrm>
+          <a:prstGeom prst="rect">
+            <a:avLst/>
+          </a:prstGeom>
+        </p:spPr>
+        <p:style>
+          <a:lnRef idx="1">
+            <a:schemeClr val="accent5"/>
+          </a:lnRef>
+          <a:fillRef idx="3">
+            <a:schemeClr val="accent5"/>
+          </a:fillRef>
+          <a:effectRef idx="2">
+            <a:schemeClr val="accent5"/>
+          </a:effectRef>
+          <a:fontRef idx="minor">
+            <a:schemeClr val="lt1"/>
+          </a:fontRef>
+        </p:style>
+        <p:txBody>
+          <a:bodyPr rtlCol="0" anchor="ctr"/>
+          <a:lstStyle/>
+          <a:p>
+            <a:pPr algn="ctr"/>
+            <a:endParaRPr lang="en-US"/>
           </a:p>
         </p:txBody>
       </p:sp>
@@ -9474,6 +9694,50 @@
           </a:ln>
         </p:spPr>
       </p:pic>
+      <p:sp>
+        <p:nvSpPr>
+          <p:cNvPr id="4" name="Rectangle 3">
+            <a:extLst>
+              <a:ext uri="{FF2B5EF4-FFF2-40B4-BE49-F238E27FC236}">
+                <a16:creationId xmlns:a16="http://schemas.microsoft.com/office/drawing/2014/main" id="{76C071BB-80A3-DFBF-9184-BCAD9271F877}"/>
+              </a:ext>
+            </a:extLst>
+          </p:cNvPr>
+          <p:cNvSpPr/>
+          <p:nvPr/>
+        </p:nvSpPr>
+        <p:spPr>
+          <a:xfrm>
+            <a:off x="10674981" y="927100"/>
+            <a:ext cx="735969" cy="571500"/>
+          </a:xfrm>
+          <a:prstGeom prst="rect">
+            <a:avLst/>
+          </a:prstGeom>
+        </p:spPr>
+        <p:style>
+          <a:lnRef idx="1">
+            <a:schemeClr val="accent5"/>
+          </a:lnRef>
+          <a:fillRef idx="3">
+            <a:schemeClr val="accent5"/>
+          </a:fillRef>
+          <a:effectRef idx="2">
+            <a:schemeClr val="accent5"/>
+          </a:effectRef>
+          <a:fontRef idx="minor">
+            <a:schemeClr val="lt1"/>
+          </a:fontRef>
+        </p:style>
+        <p:txBody>
+          <a:bodyPr rtlCol="0" anchor="ctr"/>
+          <a:lstStyle/>
+          <a:p>
+            <a:pPr algn="ctr"/>
+            <a:endParaRPr lang="en-US"/>
+          </a:p>
+        </p:txBody>
+      </p:sp>
     </p:spTree>
     <p:extLst>
       <p:ext uri="{BB962C8B-B14F-4D97-AF65-F5344CB8AC3E}">
@@ -9882,6 +10146,50 @@
           </a:p>
         </p:txBody>
       </p:sp>
+      <p:sp>
+        <p:nvSpPr>
+          <p:cNvPr id="4" name="Rectangle 3">
+            <a:extLst>
+              <a:ext uri="{FF2B5EF4-FFF2-40B4-BE49-F238E27FC236}">
+                <a16:creationId xmlns:a16="http://schemas.microsoft.com/office/drawing/2014/main" id="{FB322AE5-BACA-175D-3291-6E3C36A1A180}"/>
+              </a:ext>
+            </a:extLst>
+          </p:cNvPr>
+          <p:cNvSpPr/>
+          <p:nvPr/>
+        </p:nvSpPr>
+        <p:spPr>
+          <a:xfrm>
+            <a:off x="10674981" y="927100"/>
+            <a:ext cx="735969" cy="571500"/>
+          </a:xfrm>
+          <a:prstGeom prst="rect">
+            <a:avLst/>
+          </a:prstGeom>
+        </p:spPr>
+        <p:style>
+          <a:lnRef idx="1">
+            <a:schemeClr val="accent5"/>
+          </a:lnRef>
+          <a:fillRef idx="3">
+            <a:schemeClr val="accent5"/>
+          </a:fillRef>
+          <a:effectRef idx="2">
+            <a:schemeClr val="accent5"/>
+          </a:effectRef>
+          <a:fontRef idx="minor">
+            <a:schemeClr val="lt1"/>
+          </a:fontRef>
+        </p:style>
+        <p:txBody>
+          <a:bodyPr rtlCol="0" anchor="ctr"/>
+          <a:lstStyle/>
+          <a:p>
+            <a:pPr algn="ctr"/>
+            <a:endParaRPr lang="en-US"/>
+          </a:p>
+        </p:txBody>
+      </p:sp>
     </p:spTree>
     <p:extLst>
       <p:ext uri="{BB962C8B-B14F-4D97-AF65-F5344CB8AC3E}">
@@ -10195,6 +10503,50 @@
           </a:ln>
         </p:spPr>
       </p:pic>
+      <p:sp>
+        <p:nvSpPr>
+          <p:cNvPr id="4" name="Rectangle 3">
+            <a:extLst>
+              <a:ext uri="{FF2B5EF4-FFF2-40B4-BE49-F238E27FC236}">
+                <a16:creationId xmlns:a16="http://schemas.microsoft.com/office/drawing/2014/main" id="{ECA3C5FD-A517-8860-051E-D356CE380A20}"/>
+              </a:ext>
+            </a:extLst>
+          </p:cNvPr>
+          <p:cNvSpPr/>
+          <p:nvPr/>
+        </p:nvSpPr>
+        <p:spPr>
+          <a:xfrm>
+            <a:off x="10674981" y="927100"/>
+            <a:ext cx="735969" cy="571500"/>
+          </a:xfrm>
+          <a:prstGeom prst="rect">
+            <a:avLst/>
+          </a:prstGeom>
+        </p:spPr>
+        <p:style>
+          <a:lnRef idx="1">
+            <a:schemeClr val="accent5"/>
+          </a:lnRef>
+          <a:fillRef idx="3">
+            <a:schemeClr val="accent5"/>
+          </a:fillRef>
+          <a:effectRef idx="2">
+            <a:schemeClr val="accent5"/>
+          </a:effectRef>
+          <a:fontRef idx="minor">
+            <a:schemeClr val="lt1"/>
+          </a:fontRef>
+        </p:style>
+        <p:txBody>
+          <a:bodyPr rtlCol="0" anchor="ctr"/>
+          <a:lstStyle/>
+          <a:p>
+            <a:pPr algn="ctr"/>
+            <a:endParaRPr lang="en-US"/>
+          </a:p>
+        </p:txBody>
+      </p:sp>
     </p:spTree>
     <p:extLst>
       <p:ext uri="{BB962C8B-B14F-4D97-AF65-F5344CB8AC3E}">
@@ -10443,6 +10795,50 @@
           </a:p>
         </p:txBody>
       </p:sp>
+      <p:sp>
+        <p:nvSpPr>
+          <p:cNvPr id="4" name="Rectangle 3">
+            <a:extLst>
+              <a:ext uri="{FF2B5EF4-FFF2-40B4-BE49-F238E27FC236}">
+                <a16:creationId xmlns:a16="http://schemas.microsoft.com/office/drawing/2014/main" id="{48B0694E-DA70-2795-D5C8-CC0518BF3D11}"/>
+              </a:ext>
+            </a:extLst>
+          </p:cNvPr>
+          <p:cNvSpPr/>
+          <p:nvPr/>
+        </p:nvSpPr>
+        <p:spPr>
+          <a:xfrm>
+            <a:off x="10674981" y="927100"/>
+            <a:ext cx="735969" cy="571500"/>
+          </a:xfrm>
+          <a:prstGeom prst="rect">
+            <a:avLst/>
+          </a:prstGeom>
+        </p:spPr>
+        <p:style>
+          <a:lnRef idx="1">
+            <a:schemeClr val="accent5"/>
+          </a:lnRef>
+          <a:fillRef idx="3">
+            <a:schemeClr val="accent5"/>
+          </a:fillRef>
+          <a:effectRef idx="2">
+            <a:schemeClr val="accent5"/>
+          </a:effectRef>
+          <a:fontRef idx="minor">
+            <a:schemeClr val="lt1"/>
+          </a:fontRef>
+        </p:style>
+        <p:txBody>
+          <a:bodyPr rtlCol="0" anchor="ctr"/>
+          <a:lstStyle/>
+          <a:p>
+            <a:pPr algn="ctr"/>
+            <a:endParaRPr lang="en-US"/>
+          </a:p>
+        </p:txBody>
+      </p:sp>
     </p:spTree>
     <p:extLst>
       <p:ext uri="{BB962C8B-B14F-4D97-AF65-F5344CB8AC3E}">
@@ -11258,6 +11654,50 @@
           </a:p>
         </p:txBody>
       </p:sp>
+      <p:sp>
+        <p:nvSpPr>
+          <p:cNvPr id="4" name="Rectangle 3">
+            <a:extLst>
+              <a:ext uri="{FF2B5EF4-FFF2-40B4-BE49-F238E27FC236}">
+                <a16:creationId xmlns:a16="http://schemas.microsoft.com/office/drawing/2014/main" id="{BA17C6A7-230C-142E-F7DD-657C3FEDA610}"/>
+              </a:ext>
+            </a:extLst>
+          </p:cNvPr>
+          <p:cNvSpPr/>
+          <p:nvPr/>
+        </p:nvSpPr>
+        <p:spPr>
+          <a:xfrm>
+            <a:off x="10674981" y="927100"/>
+            <a:ext cx="735969" cy="571500"/>
+          </a:xfrm>
+          <a:prstGeom prst="rect">
+            <a:avLst/>
+          </a:prstGeom>
+        </p:spPr>
+        <p:style>
+          <a:lnRef idx="1">
+            <a:schemeClr val="accent5"/>
+          </a:lnRef>
+          <a:fillRef idx="3">
+            <a:schemeClr val="accent5"/>
+          </a:fillRef>
+          <a:effectRef idx="2">
+            <a:schemeClr val="accent5"/>
+          </a:effectRef>
+          <a:fontRef idx="minor">
+            <a:schemeClr val="lt1"/>
+          </a:fontRef>
+        </p:style>
+        <p:txBody>
+          <a:bodyPr rtlCol="0" anchor="ctr"/>
+          <a:lstStyle/>
+          <a:p>
+            <a:pPr algn="ctr"/>
+            <a:endParaRPr lang="en-US"/>
+          </a:p>
+        </p:txBody>
+      </p:sp>
     </p:spTree>
     <p:extLst>
       <p:ext uri="{BB962C8B-B14F-4D97-AF65-F5344CB8AC3E}">
@@ -11733,6 +12173,50 @@
           </a:p>
         </p:txBody>
       </p:sp>
+      <p:sp>
+        <p:nvSpPr>
+          <p:cNvPr id="4" name="Rectangle 3">
+            <a:extLst>
+              <a:ext uri="{FF2B5EF4-FFF2-40B4-BE49-F238E27FC236}">
+                <a16:creationId xmlns:a16="http://schemas.microsoft.com/office/drawing/2014/main" id="{39A5C6C8-311F-477F-C26C-E6A8A9B2103A}"/>
+              </a:ext>
+            </a:extLst>
+          </p:cNvPr>
+          <p:cNvSpPr/>
+          <p:nvPr/>
+        </p:nvSpPr>
+        <p:spPr>
+          <a:xfrm>
+            <a:off x="10674981" y="927100"/>
+            <a:ext cx="735969" cy="571500"/>
+          </a:xfrm>
+          <a:prstGeom prst="rect">
+            <a:avLst/>
+          </a:prstGeom>
+        </p:spPr>
+        <p:style>
+          <a:lnRef idx="1">
+            <a:schemeClr val="accent5"/>
+          </a:lnRef>
+          <a:fillRef idx="3">
+            <a:schemeClr val="accent5"/>
+          </a:fillRef>
+          <a:effectRef idx="2">
+            <a:schemeClr val="accent5"/>
+          </a:effectRef>
+          <a:fontRef idx="minor">
+            <a:schemeClr val="lt1"/>
+          </a:fontRef>
+        </p:style>
+        <p:txBody>
+          <a:bodyPr rtlCol="0" anchor="ctr"/>
+          <a:lstStyle/>
+          <a:p>
+            <a:pPr algn="ctr"/>
+            <a:endParaRPr lang="en-US"/>
+          </a:p>
+        </p:txBody>
+      </p:sp>
     </p:spTree>
     <p:extLst>
       <p:ext uri="{BB962C8B-B14F-4D97-AF65-F5344CB8AC3E}">
@@ -12241,6 +12725,50 @@
           </a:ln>
         </p:spPr>
       </p:pic>
+      <p:sp>
+        <p:nvSpPr>
+          <p:cNvPr id="4" name="Rectangle 3">
+            <a:extLst>
+              <a:ext uri="{FF2B5EF4-FFF2-40B4-BE49-F238E27FC236}">
+                <a16:creationId xmlns:a16="http://schemas.microsoft.com/office/drawing/2014/main" id="{D03A7779-F03B-ECF0-CC42-1E10BFE4CFFC}"/>
+              </a:ext>
+            </a:extLst>
+          </p:cNvPr>
+          <p:cNvSpPr/>
+          <p:nvPr/>
+        </p:nvSpPr>
+        <p:spPr>
+          <a:xfrm>
+            <a:off x="10674981" y="927100"/>
+            <a:ext cx="735969" cy="571500"/>
+          </a:xfrm>
+          <a:prstGeom prst="rect">
+            <a:avLst/>
+          </a:prstGeom>
+        </p:spPr>
+        <p:style>
+          <a:lnRef idx="1">
+            <a:schemeClr val="accent5"/>
+          </a:lnRef>
+          <a:fillRef idx="3">
+            <a:schemeClr val="accent5"/>
+          </a:fillRef>
+          <a:effectRef idx="2">
+            <a:schemeClr val="accent5"/>
+          </a:effectRef>
+          <a:fontRef idx="minor">
+            <a:schemeClr val="lt1"/>
+          </a:fontRef>
+        </p:style>
+        <p:txBody>
+          <a:bodyPr rtlCol="0" anchor="ctr"/>
+          <a:lstStyle/>
+          <a:p>
+            <a:pPr algn="ctr"/>
+            <a:endParaRPr lang="en-US"/>
+          </a:p>
+        </p:txBody>
+      </p:sp>
     </p:spTree>
     <p:extLst>
       <p:ext uri="{BB962C8B-B14F-4D97-AF65-F5344CB8AC3E}">
@@ -12517,6 +13045,50 @@
               <a:uFillTx/>
               <a:latin typeface="Arial"/>
             </a:endParaRPr>
+          </a:p>
+        </p:txBody>
+      </p:sp>
+      <p:sp>
+        <p:nvSpPr>
+          <p:cNvPr id="4" name="Rectangle 3">
+            <a:extLst>
+              <a:ext uri="{FF2B5EF4-FFF2-40B4-BE49-F238E27FC236}">
+                <a16:creationId xmlns:a16="http://schemas.microsoft.com/office/drawing/2014/main" id="{7189FCCA-E528-9AF0-B5AC-E0B1C4FC87C9}"/>
+              </a:ext>
+            </a:extLst>
+          </p:cNvPr>
+          <p:cNvSpPr/>
+          <p:nvPr/>
+        </p:nvSpPr>
+        <p:spPr>
+          <a:xfrm>
+            <a:off x="10674981" y="927100"/>
+            <a:ext cx="735969" cy="571500"/>
+          </a:xfrm>
+          <a:prstGeom prst="rect">
+            <a:avLst/>
+          </a:prstGeom>
+        </p:spPr>
+        <p:style>
+          <a:lnRef idx="1">
+            <a:schemeClr val="accent5"/>
+          </a:lnRef>
+          <a:fillRef idx="3">
+            <a:schemeClr val="accent5"/>
+          </a:fillRef>
+          <a:effectRef idx="2">
+            <a:schemeClr val="accent5"/>
+          </a:effectRef>
+          <a:fontRef idx="minor">
+            <a:schemeClr val="lt1"/>
+          </a:fontRef>
+        </p:style>
+        <p:txBody>
+          <a:bodyPr rtlCol="0" anchor="ctr"/>
+          <a:lstStyle/>
+          <a:p>
+            <a:pPr algn="ctr"/>
+            <a:endParaRPr lang="en-US"/>
           </a:p>
         </p:txBody>
       </p:sp>
@@ -12612,6 +13184,50 @@
           </a:ln>
         </p:spPr>
       </p:pic>
+      <p:sp>
+        <p:nvSpPr>
+          <p:cNvPr id="4" name="Rectangle 3">
+            <a:extLst>
+              <a:ext uri="{FF2B5EF4-FFF2-40B4-BE49-F238E27FC236}">
+                <a16:creationId xmlns:a16="http://schemas.microsoft.com/office/drawing/2014/main" id="{145FEEAD-34C5-87B5-1931-C62AFC5C50AC}"/>
+              </a:ext>
+            </a:extLst>
+          </p:cNvPr>
+          <p:cNvSpPr/>
+          <p:nvPr/>
+        </p:nvSpPr>
+        <p:spPr>
+          <a:xfrm>
+            <a:off x="10674981" y="927100"/>
+            <a:ext cx="735969" cy="571500"/>
+          </a:xfrm>
+          <a:prstGeom prst="rect">
+            <a:avLst/>
+          </a:prstGeom>
+        </p:spPr>
+        <p:style>
+          <a:lnRef idx="1">
+            <a:schemeClr val="accent5"/>
+          </a:lnRef>
+          <a:fillRef idx="3">
+            <a:schemeClr val="accent5"/>
+          </a:fillRef>
+          <a:effectRef idx="2">
+            <a:schemeClr val="accent5"/>
+          </a:effectRef>
+          <a:fontRef idx="minor">
+            <a:schemeClr val="lt1"/>
+          </a:fontRef>
+        </p:style>
+        <p:txBody>
+          <a:bodyPr rtlCol="0" anchor="ctr"/>
+          <a:lstStyle/>
+          <a:p>
+            <a:pPr algn="ctr"/>
+            <a:endParaRPr lang="en-US"/>
+          </a:p>
+        </p:txBody>
+      </p:sp>
     </p:spTree>
     <p:extLst>
       <p:ext uri="{BB962C8B-B14F-4D97-AF65-F5344CB8AC3E}">
@@ -12883,6 +13499,50 @@
               <a:uFillTx/>
               <a:latin typeface="Arial"/>
             </a:endParaRPr>
+          </a:p>
+        </p:txBody>
+      </p:sp>
+      <p:sp>
+        <p:nvSpPr>
+          <p:cNvPr id="4" name="Rectangle 3">
+            <a:extLst>
+              <a:ext uri="{FF2B5EF4-FFF2-40B4-BE49-F238E27FC236}">
+                <a16:creationId xmlns:a16="http://schemas.microsoft.com/office/drawing/2014/main" id="{C3968FD6-8DD4-9E36-1F68-4A56FD2E825B}"/>
+              </a:ext>
+            </a:extLst>
+          </p:cNvPr>
+          <p:cNvSpPr/>
+          <p:nvPr/>
+        </p:nvSpPr>
+        <p:spPr>
+          <a:xfrm>
+            <a:off x="10674981" y="927100"/>
+            <a:ext cx="735969" cy="571500"/>
+          </a:xfrm>
+          <a:prstGeom prst="rect">
+            <a:avLst/>
+          </a:prstGeom>
+        </p:spPr>
+        <p:style>
+          <a:lnRef idx="1">
+            <a:schemeClr val="accent5"/>
+          </a:lnRef>
+          <a:fillRef idx="3">
+            <a:schemeClr val="accent5"/>
+          </a:fillRef>
+          <a:effectRef idx="2">
+            <a:schemeClr val="accent5"/>
+          </a:effectRef>
+          <a:fontRef idx="minor">
+            <a:schemeClr val="lt1"/>
+          </a:fontRef>
+        </p:style>
+        <p:txBody>
+          <a:bodyPr rtlCol="0" anchor="ctr"/>
+          <a:lstStyle/>
+          <a:p>
+            <a:pPr algn="ctr"/>
+            <a:endParaRPr lang="en-US"/>
           </a:p>
         </p:txBody>
       </p:sp>
@@ -15914,6 +16574,50 @@
           </a:p>
         </p:txBody>
       </p:sp>
+      <p:sp>
+        <p:nvSpPr>
+          <p:cNvPr id="6" name="Rectangle 5">
+            <a:extLst>
+              <a:ext uri="{FF2B5EF4-FFF2-40B4-BE49-F238E27FC236}">
+                <a16:creationId xmlns:a16="http://schemas.microsoft.com/office/drawing/2014/main" id="{75A5EC3C-513C-6244-CEC9-3BC621F6C0D5}"/>
+              </a:ext>
+            </a:extLst>
+          </p:cNvPr>
+          <p:cNvSpPr/>
+          <p:nvPr/>
+        </p:nvSpPr>
+        <p:spPr>
+          <a:xfrm>
+            <a:off x="10674981" y="927100"/>
+            <a:ext cx="735969" cy="571500"/>
+          </a:xfrm>
+          <a:prstGeom prst="rect">
+            <a:avLst/>
+          </a:prstGeom>
+        </p:spPr>
+        <p:style>
+          <a:lnRef idx="1">
+            <a:schemeClr val="accent5"/>
+          </a:lnRef>
+          <a:fillRef idx="3">
+            <a:schemeClr val="accent5"/>
+          </a:fillRef>
+          <a:effectRef idx="2">
+            <a:schemeClr val="accent5"/>
+          </a:effectRef>
+          <a:fontRef idx="minor">
+            <a:schemeClr val="lt1"/>
+          </a:fontRef>
+        </p:style>
+        <p:txBody>
+          <a:bodyPr rtlCol="0" anchor="ctr"/>
+          <a:lstStyle/>
+          <a:p>
+            <a:pPr algn="ctr"/>
+            <a:endParaRPr lang="en-US"/>
+          </a:p>
+        </p:txBody>
+      </p:sp>
     </p:spTree>
     <p:extLst>
       <p:ext uri="{BB962C8B-B14F-4D97-AF65-F5344CB8AC3E}">
@@ -16886,6 +17590,50 @@
           </a:p>
         </p:txBody>
       </p:sp>
+      <p:sp>
+        <p:nvSpPr>
+          <p:cNvPr id="4" name="Rectangle 3">
+            <a:extLst>
+              <a:ext uri="{FF2B5EF4-FFF2-40B4-BE49-F238E27FC236}">
+                <a16:creationId xmlns:a16="http://schemas.microsoft.com/office/drawing/2014/main" id="{6CE79AC4-3169-0A09-A6F3-B7C0CAD49691}"/>
+              </a:ext>
+            </a:extLst>
+          </p:cNvPr>
+          <p:cNvSpPr/>
+          <p:nvPr/>
+        </p:nvSpPr>
+        <p:spPr>
+          <a:xfrm>
+            <a:off x="10674981" y="927100"/>
+            <a:ext cx="735969" cy="571500"/>
+          </a:xfrm>
+          <a:prstGeom prst="rect">
+            <a:avLst/>
+          </a:prstGeom>
+        </p:spPr>
+        <p:style>
+          <a:lnRef idx="1">
+            <a:schemeClr val="accent5"/>
+          </a:lnRef>
+          <a:fillRef idx="3">
+            <a:schemeClr val="accent5"/>
+          </a:fillRef>
+          <a:effectRef idx="2">
+            <a:schemeClr val="accent5"/>
+          </a:effectRef>
+          <a:fontRef idx="minor">
+            <a:schemeClr val="lt1"/>
+          </a:fontRef>
+        </p:style>
+        <p:txBody>
+          <a:bodyPr rtlCol="0" anchor="ctr"/>
+          <a:lstStyle/>
+          <a:p>
+            <a:pPr algn="ctr"/>
+            <a:endParaRPr lang="en-US"/>
+          </a:p>
+        </p:txBody>
+      </p:sp>
     </p:spTree>
     <p:extLst>
       <p:ext uri="{BB962C8B-B14F-4D97-AF65-F5344CB8AC3E}">
@@ -18719,6 +19467,50 @@
           </a:p>
         </p:txBody>
       </p:sp>
+      <p:sp>
+        <p:nvSpPr>
+          <p:cNvPr id="4" name="Rectangle 3">
+            <a:extLst>
+              <a:ext uri="{FF2B5EF4-FFF2-40B4-BE49-F238E27FC236}">
+                <a16:creationId xmlns:a16="http://schemas.microsoft.com/office/drawing/2014/main" id="{63533DA4-9E36-8D3C-A0E4-7F1C9C0C7E18}"/>
+              </a:ext>
+            </a:extLst>
+          </p:cNvPr>
+          <p:cNvSpPr/>
+          <p:nvPr/>
+        </p:nvSpPr>
+        <p:spPr>
+          <a:xfrm>
+            <a:off x="10674981" y="927100"/>
+            <a:ext cx="735969" cy="571500"/>
+          </a:xfrm>
+          <a:prstGeom prst="rect">
+            <a:avLst/>
+          </a:prstGeom>
+        </p:spPr>
+        <p:style>
+          <a:lnRef idx="1">
+            <a:schemeClr val="accent5"/>
+          </a:lnRef>
+          <a:fillRef idx="3">
+            <a:schemeClr val="accent5"/>
+          </a:fillRef>
+          <a:effectRef idx="2">
+            <a:schemeClr val="accent5"/>
+          </a:effectRef>
+          <a:fontRef idx="minor">
+            <a:schemeClr val="lt1"/>
+          </a:fontRef>
+        </p:style>
+        <p:txBody>
+          <a:bodyPr rtlCol="0" anchor="ctr"/>
+          <a:lstStyle/>
+          <a:p>
+            <a:pPr algn="ctr"/>
+            <a:endParaRPr lang="en-US"/>
+          </a:p>
+        </p:txBody>
+      </p:sp>
     </p:spTree>
     <p:extLst>
       <p:ext uri="{BB962C8B-B14F-4D97-AF65-F5344CB8AC3E}">
@@ -19121,6 +19913,50 @@
               <a:effectLst/>
               <a:latin typeface="Consolas" panose="020B0609020204030204" pitchFamily="49" charset="0"/>
             </a:endParaRPr>
+          </a:p>
+        </p:txBody>
+      </p:sp>
+      <p:sp>
+        <p:nvSpPr>
+          <p:cNvPr id="4" name="Rectangle 3">
+            <a:extLst>
+              <a:ext uri="{FF2B5EF4-FFF2-40B4-BE49-F238E27FC236}">
+                <a16:creationId xmlns:a16="http://schemas.microsoft.com/office/drawing/2014/main" id="{17963456-75F7-40F8-E40C-A0A18439DAE6}"/>
+              </a:ext>
+            </a:extLst>
+          </p:cNvPr>
+          <p:cNvSpPr/>
+          <p:nvPr/>
+        </p:nvSpPr>
+        <p:spPr>
+          <a:xfrm>
+            <a:off x="10674981" y="927100"/>
+            <a:ext cx="735969" cy="571500"/>
+          </a:xfrm>
+          <a:prstGeom prst="rect">
+            <a:avLst/>
+          </a:prstGeom>
+        </p:spPr>
+        <p:style>
+          <a:lnRef idx="1">
+            <a:schemeClr val="accent5"/>
+          </a:lnRef>
+          <a:fillRef idx="3">
+            <a:schemeClr val="accent5"/>
+          </a:fillRef>
+          <a:effectRef idx="2">
+            <a:schemeClr val="accent5"/>
+          </a:effectRef>
+          <a:fontRef idx="minor">
+            <a:schemeClr val="lt1"/>
+          </a:fontRef>
+        </p:style>
+        <p:txBody>
+          <a:bodyPr rtlCol="0" anchor="ctr"/>
+          <a:lstStyle/>
+          <a:p>
+            <a:pPr algn="ctr"/>
+            <a:endParaRPr lang="en-US"/>
           </a:p>
         </p:txBody>
       </p:sp>
@@ -20154,6 +20990,50 @@
           </a:p>
         </p:txBody>
       </p:sp>
+      <p:sp>
+        <p:nvSpPr>
+          <p:cNvPr id="4" name="Rectangle 3">
+            <a:extLst>
+              <a:ext uri="{FF2B5EF4-FFF2-40B4-BE49-F238E27FC236}">
+                <a16:creationId xmlns:a16="http://schemas.microsoft.com/office/drawing/2014/main" id="{206A4CEE-D69E-20D8-F888-B492B429CCAE}"/>
+              </a:ext>
+            </a:extLst>
+          </p:cNvPr>
+          <p:cNvSpPr/>
+          <p:nvPr/>
+        </p:nvSpPr>
+        <p:spPr>
+          <a:xfrm>
+            <a:off x="10801981" y="749300"/>
+            <a:ext cx="735969" cy="571500"/>
+          </a:xfrm>
+          <a:prstGeom prst="rect">
+            <a:avLst/>
+          </a:prstGeom>
+        </p:spPr>
+        <p:style>
+          <a:lnRef idx="1">
+            <a:schemeClr val="accent5"/>
+          </a:lnRef>
+          <a:fillRef idx="3">
+            <a:schemeClr val="accent5"/>
+          </a:fillRef>
+          <a:effectRef idx="2">
+            <a:schemeClr val="accent5"/>
+          </a:effectRef>
+          <a:fontRef idx="minor">
+            <a:schemeClr val="lt1"/>
+          </a:fontRef>
+        </p:style>
+        <p:txBody>
+          <a:bodyPr rtlCol="0" anchor="ctr"/>
+          <a:lstStyle/>
+          <a:p>
+            <a:pPr algn="ctr"/>
+            <a:endParaRPr lang="en-US"/>
+          </a:p>
+        </p:txBody>
+      </p:sp>
     </p:spTree>
     <p:extLst>
       <p:ext uri="{BB962C8B-B14F-4D97-AF65-F5344CB8AC3E}">
@@ -29196,6 +30076,50 @@
           </a:p>
         </p:txBody>
       </p:sp>
+      <p:sp>
+        <p:nvSpPr>
+          <p:cNvPr id="4" name="Rectangle 3">
+            <a:extLst>
+              <a:ext uri="{FF2B5EF4-FFF2-40B4-BE49-F238E27FC236}">
+                <a16:creationId xmlns:a16="http://schemas.microsoft.com/office/drawing/2014/main" id="{C457C3DD-E641-396D-4FDD-174C4323C816}"/>
+              </a:ext>
+            </a:extLst>
+          </p:cNvPr>
+          <p:cNvSpPr/>
+          <p:nvPr/>
+        </p:nvSpPr>
+        <p:spPr>
+          <a:xfrm>
+            <a:off x="10674981" y="927100"/>
+            <a:ext cx="735969" cy="571500"/>
+          </a:xfrm>
+          <a:prstGeom prst="rect">
+            <a:avLst/>
+          </a:prstGeom>
+        </p:spPr>
+        <p:style>
+          <a:lnRef idx="1">
+            <a:schemeClr val="accent5"/>
+          </a:lnRef>
+          <a:fillRef idx="3">
+            <a:schemeClr val="accent5"/>
+          </a:fillRef>
+          <a:effectRef idx="2">
+            <a:schemeClr val="accent5"/>
+          </a:effectRef>
+          <a:fontRef idx="minor">
+            <a:schemeClr val="lt1"/>
+          </a:fontRef>
+        </p:style>
+        <p:txBody>
+          <a:bodyPr rtlCol="0" anchor="ctr"/>
+          <a:lstStyle/>
+          <a:p>
+            <a:pPr algn="ctr"/>
+            <a:endParaRPr lang="en-US"/>
+          </a:p>
+        </p:txBody>
+      </p:sp>
     </p:spTree>
     <p:extLst>
       <p:ext uri="{BB962C8B-B14F-4D97-AF65-F5344CB8AC3E}">
@@ -29706,6 +30630,50 @@
               </a:rPr>
               <a:t>":true}';</a:t>
             </a:r>
+          </a:p>
+        </p:txBody>
+      </p:sp>
+      <p:sp>
+        <p:nvSpPr>
+          <p:cNvPr id="4" name="Rectangle 3">
+            <a:extLst>
+              <a:ext uri="{FF2B5EF4-FFF2-40B4-BE49-F238E27FC236}">
+                <a16:creationId xmlns:a16="http://schemas.microsoft.com/office/drawing/2014/main" id="{A8C74A8C-338C-9433-BCCB-D27F748526B0}"/>
+              </a:ext>
+            </a:extLst>
+          </p:cNvPr>
+          <p:cNvSpPr/>
+          <p:nvPr/>
+        </p:nvSpPr>
+        <p:spPr>
+          <a:xfrm>
+            <a:off x="10674981" y="927100"/>
+            <a:ext cx="735969" cy="571500"/>
+          </a:xfrm>
+          <a:prstGeom prst="rect">
+            <a:avLst/>
+          </a:prstGeom>
+        </p:spPr>
+        <p:style>
+          <a:lnRef idx="1">
+            <a:schemeClr val="accent5"/>
+          </a:lnRef>
+          <a:fillRef idx="3">
+            <a:schemeClr val="accent5"/>
+          </a:fillRef>
+          <a:effectRef idx="2">
+            <a:schemeClr val="accent5"/>
+          </a:effectRef>
+          <a:fontRef idx="minor">
+            <a:schemeClr val="lt1"/>
+          </a:fontRef>
+        </p:style>
+        <p:txBody>
+          <a:bodyPr rtlCol="0" anchor="ctr"/>
+          <a:lstStyle/>
+          <a:p>
+            <a:pPr algn="ctr"/>
+            <a:endParaRPr lang="en-US"/>
           </a:p>
         </p:txBody>
       </p:sp>

--- a/Week_3/SQL_postgres.pptx
+++ b/Week_3/SQL_postgres.pptx
@@ -25450,15 +25450,33 @@
               </a:lnSpc>
             </a:pPr>
             <a:r>
-              <a:rPr lang="en-US" sz="1400" b="0" u="none" strike="noStrike">
+              <a:rPr lang="en-US" sz="1400" b="0" u="none" strike="noStrike" dirty="0">
                 <a:effectLst/>
                 <a:uFillTx/>
                 <a:latin typeface="Consolas"/>
                 <a:ea typeface="Arial"/>
               </a:rPr>
-              <a:t>CALL get_user_count(NULL);</a:t>
-            </a:r>
-            <a:endParaRPr lang="en-US" sz="1400" b="0" u="none" strike="noStrike">
+              <a:t>CALL </a:t>
+            </a:r>
+            <a:r>
+              <a:rPr lang="en-US" sz="1400" b="0" u="none" strike="noStrike" dirty="0" err="1">
+                <a:effectLst/>
+                <a:uFillTx/>
+                <a:latin typeface="Consolas"/>
+                <a:ea typeface="Arial"/>
+              </a:rPr>
+              <a:t>get_user_count</a:t>
+            </a:r>
+            <a:r>
+              <a:rPr lang="en-US" sz="1400" b="0" u="none" strike="noStrike" dirty="0">
+                <a:effectLst/>
+                <a:uFillTx/>
+                <a:latin typeface="Consolas"/>
+                <a:ea typeface="Arial"/>
+              </a:rPr>
+              <a:t>(NULL);</a:t>
+            </a:r>
+            <a:endParaRPr lang="en-US" sz="1400" b="0" u="none" strike="noStrike" dirty="0">
               <a:effectLst/>
               <a:uFillTx/>
               <a:latin typeface="Arial"/>
@@ -29137,15 +29155,33 @@
               </a:lnSpc>
             </a:pPr>
             <a:r>
-              <a:rPr lang="en-US" sz="1400" b="0" u="none" strike="noStrike">
+              <a:rPr lang="en-US" sz="1400" b="0" u="none" strike="noStrike" dirty="0">
                 <a:effectLst/>
                 <a:uFillTx/>
                 <a:latin typeface="Consolas"/>
                 <a:ea typeface="Arial"/>
               </a:rPr>
-              <a:t>CREATE INDEX idx_users_email ON customer (email);</a:t>
-            </a:r>
-            <a:endParaRPr lang="en-US" sz="1400" b="0" u="none" strike="noStrike">
+              <a:t>CREATE INDEX </a:t>
+            </a:r>
+            <a:r>
+              <a:rPr lang="en-US" sz="1400" b="0" u="none" strike="noStrike" dirty="0" err="1">
+                <a:effectLst/>
+                <a:uFillTx/>
+                <a:latin typeface="Consolas"/>
+                <a:ea typeface="Arial"/>
+              </a:rPr>
+              <a:t>idx_users_email</a:t>
+            </a:r>
+            <a:r>
+              <a:rPr lang="en-US" sz="1400" b="0" u="none" strike="noStrike" dirty="0">
+                <a:effectLst/>
+                <a:uFillTx/>
+                <a:latin typeface="Consolas"/>
+                <a:ea typeface="Arial"/>
+              </a:rPr>
+              <a:t> ON customer (email);</a:t>
+            </a:r>
+            <a:endParaRPr lang="en-US" sz="1400" b="0" u="none" strike="noStrike" dirty="0">
               <a:effectLst/>
               <a:uFillTx/>
               <a:latin typeface="Arial"/>
@@ -34182,7 +34218,7 @@
         </p:nvSpPr>
         <p:spPr>
           <a:xfrm>
-            <a:off x="7044325" y="3491630"/>
+            <a:off x="7037975" y="3478930"/>
             <a:ext cx="3164388" cy="923330"/>
           </a:xfrm>
           <a:prstGeom prst="rect">

--- a/Week_3/SQL_postgres.pptx
+++ b/Week_3/SQL_postgres.pptx
@@ -454,7 +454,7 @@
             <a:fld id="{B61BEF0D-F0BB-DE4B-95CE-6DB70DBA9567}" type="datetimeFigureOut">
               <a:rPr lang="en-US" dirty="0"/>
               <a:pPr/>
-              <a:t>9/10/2026</a:t>
+              <a:t>9/19/2026</a:t>
             </a:fld>
             <a:endParaRPr lang="en-US" dirty="0"/>
           </a:p>
@@ -716,7 +716,7 @@
             <a:fld id="{B61BEF0D-F0BB-DE4B-95CE-6DB70DBA9567}" type="datetimeFigureOut">
               <a:rPr lang="en-US" dirty="0"/>
               <a:pPr/>
-              <a:t>9/10/2026</a:t>
+              <a:t>9/19/2026</a:t>
             </a:fld>
             <a:endParaRPr lang="en-US" dirty="0"/>
           </a:p>
@@ -951,7 +951,7 @@
             <a:fld id="{B61BEF0D-F0BB-DE4B-95CE-6DB70DBA9567}" type="datetimeFigureOut">
               <a:rPr lang="en-US" dirty="0"/>
               <a:pPr/>
-              <a:t>9/10/2026</a:t>
+              <a:t>9/19/2026</a:t>
             </a:fld>
             <a:endParaRPr lang="en-US" dirty="0"/>
           </a:p>
@@ -1198,7 +1198,7 @@
             <a:fld id="{B61BEF0D-F0BB-DE4B-95CE-6DB70DBA9567}" type="datetimeFigureOut">
               <a:rPr lang="en-US" dirty="0"/>
               <a:pPr/>
-              <a:t>9/10/2026</a:t>
+              <a:t>9/19/2026</a:t>
             </a:fld>
             <a:endParaRPr lang="en-US" dirty="0"/>
           </a:p>
@@ -1506,7 +1506,7 @@
             <a:fld id="{B61BEF0D-F0BB-DE4B-95CE-6DB70DBA9567}" type="datetimeFigureOut">
               <a:rPr lang="en-US" dirty="0"/>
               <a:pPr/>
-              <a:t>9/10/2026</a:t>
+              <a:t>9/19/2026</a:t>
             </a:fld>
             <a:endParaRPr lang="en-US" dirty="0"/>
           </a:p>
@@ -1807,7 +1807,7 @@
             <a:fld id="{B61BEF0D-F0BB-DE4B-95CE-6DB70DBA9567}" type="datetimeFigureOut">
               <a:rPr lang="en-US" dirty="0"/>
               <a:pPr/>
-              <a:t>9/10/2026</a:t>
+              <a:t>9/19/2026</a:t>
             </a:fld>
             <a:endParaRPr lang="en-US" dirty="0"/>
           </a:p>
@@ -2228,7 +2228,7 @@
             <a:fld id="{B61BEF0D-F0BB-DE4B-95CE-6DB70DBA9567}" type="datetimeFigureOut">
               <a:rPr lang="en-US" dirty="0"/>
               <a:pPr/>
-              <a:t>9/10/2026</a:t>
+              <a:t>9/19/2026</a:t>
             </a:fld>
             <a:endParaRPr lang="en-US" dirty="0"/>
           </a:p>
@@ -2391,7 +2391,7 @@
             <a:fld id="{B61BEF0D-F0BB-DE4B-95CE-6DB70DBA9567}" type="datetimeFigureOut">
               <a:rPr lang="en-US" dirty="0"/>
               <a:pPr/>
-              <a:t>9/10/2026</a:t>
+              <a:t>9/19/2026</a:t>
             </a:fld>
             <a:endParaRPr lang="en-US" dirty="0"/>
           </a:p>
@@ -2488,7 +2488,7 @@
             <a:fld id="{B61BEF0D-F0BB-DE4B-95CE-6DB70DBA9567}" type="datetimeFigureOut">
               <a:rPr lang="en-US" dirty="0"/>
               <a:pPr/>
-              <a:t>9/10/2026</a:t>
+              <a:t>9/19/2026</a:t>
             </a:fld>
             <a:endParaRPr lang="en-US" dirty="0"/>
           </a:p>
@@ -2866,7 +2866,7 @@
             <a:fld id="{B61BEF0D-F0BB-DE4B-95CE-6DB70DBA9567}" type="datetimeFigureOut">
               <a:rPr lang="en-US" dirty="0"/>
               <a:pPr/>
-              <a:t>9/10/2026</a:t>
+              <a:t>9/19/2026</a:t>
             </a:fld>
             <a:endParaRPr lang="en-US" dirty="0"/>
           </a:p>
@@ -3152,7 +3152,7 @@
             <a:fld id="{B61BEF0D-F0BB-DE4B-95CE-6DB70DBA9567}" type="datetimeFigureOut">
               <a:rPr lang="en-US" dirty="0"/>
               <a:pPr/>
-              <a:t>9/10/2026</a:t>
+              <a:t>9/19/2026</a:t>
             </a:fld>
             <a:endParaRPr lang="en-US" dirty="0"/>
           </a:p>
@@ -3391,7 +3391,7 @@
             <a:fld id="{B61BEF0D-F0BB-DE4B-95CE-6DB70DBA9567}" type="datetimeFigureOut">
               <a:rPr lang="en-US" dirty="0"/>
               <a:pPr/>
-              <a:t>9/10/2026</a:t>
+              <a:t>9/19/2026</a:t>
             </a:fld>
             <a:endParaRPr lang="en-US" dirty="0"/>
           </a:p>
@@ -20551,6 +20551,18 @@
               <a:t>Traffic sent through port 5432 on host is forwarded to port 5432 inside the container </a:t>
             </a:r>
           </a:p>
+          <a:p>
+            <a:pPr lvl="1"/>
+            <a:r>
+              <a:rPr lang="en-US" dirty="0"/>
+              <a:t>We could supply a ‘-v’ flag here to setup a named volume (but without docker will provide an </a:t>
+            </a:r>
+            <a:r>
+              <a:rPr lang="en-US"/>
+              <a:t>anonymous volume)</a:t>
+            </a:r>
+            <a:endParaRPr lang="en-US" dirty="0"/>
+          </a:p>
         </p:txBody>
       </p:sp>
       <p:pic>

--- a/Week_3/SQL_postgres.pptx
+++ b/Week_3/SQL_postgres.pptx
@@ -454,7 +454,7 @@
             <a:fld id="{B61BEF0D-F0BB-DE4B-95CE-6DB70DBA9567}" type="datetimeFigureOut">
               <a:rPr lang="en-US" dirty="0"/>
               <a:pPr/>
-              <a:t>9/19/2026</a:t>
+              <a:t>9/21/2026</a:t>
             </a:fld>
             <a:endParaRPr lang="en-US" dirty="0"/>
           </a:p>
@@ -716,7 +716,7 @@
             <a:fld id="{B61BEF0D-F0BB-DE4B-95CE-6DB70DBA9567}" type="datetimeFigureOut">
               <a:rPr lang="en-US" dirty="0"/>
               <a:pPr/>
-              <a:t>9/19/2026</a:t>
+              <a:t>9/21/2026</a:t>
             </a:fld>
             <a:endParaRPr lang="en-US" dirty="0"/>
           </a:p>
@@ -951,7 +951,7 @@
             <a:fld id="{B61BEF0D-F0BB-DE4B-95CE-6DB70DBA9567}" type="datetimeFigureOut">
               <a:rPr lang="en-US" dirty="0"/>
               <a:pPr/>
-              <a:t>9/19/2026</a:t>
+              <a:t>9/21/2026</a:t>
             </a:fld>
             <a:endParaRPr lang="en-US" dirty="0"/>
           </a:p>
@@ -1198,7 +1198,7 @@
             <a:fld id="{B61BEF0D-F0BB-DE4B-95CE-6DB70DBA9567}" type="datetimeFigureOut">
               <a:rPr lang="en-US" dirty="0"/>
               <a:pPr/>
-              <a:t>9/19/2026</a:t>
+              <a:t>9/21/2026</a:t>
             </a:fld>
             <a:endParaRPr lang="en-US" dirty="0"/>
           </a:p>
@@ -1506,7 +1506,7 @@
             <a:fld id="{B61BEF0D-F0BB-DE4B-95CE-6DB70DBA9567}" type="datetimeFigureOut">
               <a:rPr lang="en-US" dirty="0"/>
               <a:pPr/>
-              <a:t>9/19/2026</a:t>
+              <a:t>9/21/2026</a:t>
             </a:fld>
             <a:endParaRPr lang="en-US" dirty="0"/>
           </a:p>
@@ -1807,7 +1807,7 @@
             <a:fld id="{B61BEF0D-F0BB-DE4B-95CE-6DB70DBA9567}" type="datetimeFigureOut">
               <a:rPr lang="en-US" dirty="0"/>
               <a:pPr/>
-              <a:t>9/19/2026</a:t>
+              <a:t>9/21/2026</a:t>
             </a:fld>
             <a:endParaRPr lang="en-US" dirty="0"/>
           </a:p>
@@ -2228,7 +2228,7 @@
             <a:fld id="{B61BEF0D-F0BB-DE4B-95CE-6DB70DBA9567}" type="datetimeFigureOut">
               <a:rPr lang="en-US" dirty="0"/>
               <a:pPr/>
-              <a:t>9/19/2026</a:t>
+              <a:t>9/21/2026</a:t>
             </a:fld>
             <a:endParaRPr lang="en-US" dirty="0"/>
           </a:p>
@@ -2391,7 +2391,7 @@
             <a:fld id="{B61BEF0D-F0BB-DE4B-95CE-6DB70DBA9567}" type="datetimeFigureOut">
               <a:rPr lang="en-US" dirty="0"/>
               <a:pPr/>
-              <a:t>9/19/2026</a:t>
+              <a:t>9/21/2026</a:t>
             </a:fld>
             <a:endParaRPr lang="en-US" dirty="0"/>
           </a:p>
@@ -2488,7 +2488,7 @@
             <a:fld id="{B61BEF0D-F0BB-DE4B-95CE-6DB70DBA9567}" type="datetimeFigureOut">
               <a:rPr lang="en-US" dirty="0"/>
               <a:pPr/>
-              <a:t>9/19/2026</a:t>
+              <a:t>9/21/2026</a:t>
             </a:fld>
             <a:endParaRPr lang="en-US" dirty="0"/>
           </a:p>
@@ -2866,7 +2866,7 @@
             <a:fld id="{B61BEF0D-F0BB-DE4B-95CE-6DB70DBA9567}" type="datetimeFigureOut">
               <a:rPr lang="en-US" dirty="0"/>
               <a:pPr/>
-              <a:t>9/19/2026</a:t>
+              <a:t>9/21/2026</a:t>
             </a:fld>
             <a:endParaRPr lang="en-US" dirty="0"/>
           </a:p>
@@ -3152,7 +3152,7 @@
             <a:fld id="{B61BEF0D-F0BB-DE4B-95CE-6DB70DBA9567}" type="datetimeFigureOut">
               <a:rPr lang="en-US" dirty="0"/>
               <a:pPr/>
-              <a:t>9/19/2026</a:t>
+              <a:t>9/21/2026</a:t>
             </a:fld>
             <a:endParaRPr lang="en-US" dirty="0"/>
           </a:p>
@@ -3391,7 +3391,7 @@
             <a:fld id="{B61BEF0D-F0BB-DE4B-95CE-6DB70DBA9567}" type="datetimeFigureOut">
               <a:rPr lang="en-US" dirty="0"/>
               <a:pPr/>
-              <a:t>9/19/2026</a:t>
+              <a:t>9/21/2026</a:t>
             </a:fld>
             <a:endParaRPr lang="en-US" dirty="0"/>
           </a:p>
@@ -21999,8 +21999,8 @@
         </p:nvSpPr>
         <p:spPr>
           <a:xfrm>
-            <a:off x="4603530" y="2749719"/>
-            <a:ext cx="2846160" cy="953640"/>
+            <a:off x="3395146" y="2494538"/>
+            <a:ext cx="5401707" cy="1168097"/>
           </a:xfrm>
           <a:prstGeom prst="rect">
             <a:avLst/>
@@ -22023,7 +22023,7 @@
           <a:fontRef idx="minor"/>
         </p:style>
         <p:txBody>
-          <a:bodyPr lIns="90000" tIns="45000" rIns="90000" bIns="45000" anchor="t">
+          <a:bodyPr wrap="square" lIns="90000" tIns="45000" rIns="90000" bIns="45000" anchor="t">
             <a:spAutoFit/>
           </a:bodyPr>
           <a:lstStyle/>
@@ -22034,7 +22034,7 @@
               </a:lnSpc>
             </a:pPr>
             <a:r>
-              <a:rPr lang="en-US" sz="1400" b="0" u="none" strike="noStrike">
+              <a:rPr lang="en-US" sz="1400" b="0" u="none" strike="noStrike" dirty="0">
                 <a:effectLst/>
                 <a:uFillTx/>
                 <a:latin typeface="Arial"/>
@@ -22042,7 +22042,7 @@
               </a:rPr>
               <a:t>MIN, MAX, AVG, COUNT, SUM</a:t>
             </a:r>
-            <a:endParaRPr lang="en-US" sz="1400" b="0" u="none" strike="noStrike">
+            <a:endParaRPr lang="en-US" sz="1400" b="0" u="none" strike="noStrike" dirty="0">
               <a:effectLst/>
               <a:uFillTx/>
               <a:latin typeface="Arial"/>
@@ -22054,7 +22054,7 @@
                 <a:spcPct val="100000"/>
               </a:lnSpc>
             </a:pPr>
-            <a:endParaRPr lang="en-US" sz="1400" b="0" u="none" strike="noStrike">
+            <a:endParaRPr lang="en-US" sz="1400" b="0" u="none" strike="noStrike" dirty="0">
               <a:effectLst/>
               <a:uFillTx/>
               <a:latin typeface="Arial"/>
@@ -22067,15 +22067,44 @@
               </a:lnSpc>
             </a:pPr>
             <a:r>
-              <a:rPr lang="en-US" sz="1400" b="0" u="none" strike="noStrike">
-                <a:effectLst/>
-                <a:uFillTx/>
-                <a:latin typeface="Arial"/>
-                <a:ea typeface="Arial"/>
-              </a:rPr>
-              <a:t>Used in GROUP BY operations to return aggregate data.</a:t>
-            </a:r>
-            <a:endParaRPr lang="en-US" sz="1400" b="0" u="none" strike="noStrike">
+              <a:rPr lang="en-US" sz="1400" b="0" u="none" strike="noStrike" dirty="0">
+                <a:effectLst/>
+                <a:uFillTx/>
+                <a:latin typeface="Arial"/>
+                <a:ea typeface="Arial"/>
+              </a:rPr>
+              <a:t>Used in GROUP BY operations to return aggregate data</a:t>
+            </a:r>
+            <a:endParaRPr lang="en-US" sz="1400" dirty="0">
+              <a:latin typeface="Arial"/>
+              <a:ea typeface="Arial"/>
+            </a:endParaRPr>
+          </a:p>
+          <a:p>
+            <a:pPr>
+              <a:lnSpc>
+                <a:spcPct val="100000"/>
+              </a:lnSpc>
+            </a:pPr>
+            <a:endParaRPr lang="en-US" sz="1400" b="0" u="none" strike="noStrike" dirty="0">
+              <a:effectLst/>
+              <a:uFillTx/>
+              <a:latin typeface="Arial"/>
+            </a:endParaRPr>
+          </a:p>
+          <a:p>
+            <a:pPr>
+              <a:lnSpc>
+                <a:spcPct val="100000"/>
+              </a:lnSpc>
+            </a:pPr>
+            <a:r>
+              <a:rPr lang="en-US" sz="1400" dirty="0">
+                <a:latin typeface="Arial"/>
+              </a:rPr>
+              <a:t>Notice the HAVING clause to filter the aggregated data</a:t>
+            </a:r>
+            <a:endParaRPr lang="en-US" sz="1400" b="0" u="none" strike="noStrike" dirty="0">
               <a:effectLst/>
               <a:uFillTx/>
               <a:latin typeface="Arial"/>
